--- a/Homework/DL_FactoryAutomation/산출물/딥러닝 프로젝트/허남_딥러닝프로젝트.pptx
+++ b/Homework/DL_FactoryAutomation/산출물/딥러닝 프로젝트/허남_딥러닝프로젝트.pptx
@@ -16,6 +16,9 @@
     <p:sldId id="264" r:id="rId15"/>
     <p:sldId id="265" r:id="rId16"/>
     <p:sldId id="266" r:id="rId17"/>
+    <p:sldId id="267" r:id="rId18"/>
+    <p:sldId id="268" r:id="rId19"/>
+    <p:sldId id="269" r:id="rId20"/>
   </p:sldIdLst>
   <p:sldSz cx="12188952" cy="6858000" type="screen4x3"/>
   <p:notesSz cx="6858000" cy="9144000"/>
@@ -5754,6 +5757,799 @@
                 </a:solidFill>
               </a:rPr>
               <a:t>D-3. DL 5종 비교</a:t>
+            </a:r>
+          </a:p>
+        </p:txBody>
+      </p:sp>
+    </p:spTree>
+  </p:cSld>
+  <p:clrMapOvr>
+    <a:masterClrMapping/>
+  </p:clrMapOvr>
+</p:sld>
+</file>
+
+<file path=ppt/slides/slide12.xml><?xml version="1.0" encoding="utf-8"?>
+<p:sld xmlns:a="http://schemas.openxmlformats.org/drawingml/2006/main" xmlns:p="http://schemas.openxmlformats.org/presentationml/2006/main" xmlns:r="http://schemas.openxmlformats.org/officeDocument/2006/relationships">
+  <p:cSld>
+    <p:spTree>
+      <p:nvGrpSpPr>
+        <p:cNvPr id="1" name=""/>
+        <p:cNvGrpSpPr/>
+        <p:nvPr/>
+      </p:nvGrpSpPr>
+      <p:grpSpPr/>
+      <p:sp>
+        <p:nvSpPr>
+          <p:cNvPr id="2" name="TextBox 1"/>
+          <p:cNvSpPr txBox="1"/>
+          <p:nvPr/>
+        </p:nvSpPr>
+        <p:spPr>
+          <a:xfrm>
+            <a:off x="228600" y="73152"/>
+            <a:ext cx="11731752" cy="475488"/>
+          </a:xfrm>
+          <a:prstGeom prst="rect">
+            <a:avLst/>
+          </a:prstGeom>
+          <a:noFill/>
+        </p:spPr>
+        <p:txBody>
+          <a:bodyPr wrap="square">
+            <a:spAutoFit/>
+          </a:bodyPr>
+          <a:lstStyle/>
+          <a:p>
+            <a:pPr algn="l"/>
+            <a:r>
+              <a:rPr sz="1700" b="1">
+                <a:solidFill>
+                  <a:srgbClr val="1F4E79"/>
+                </a:solidFill>
+              </a:rPr>
+              <a:t>부록 I. 3D 산점도 — 특징 공간에서의 이상 분리</a:t>
+            </a:r>
+          </a:p>
+        </p:txBody>
+      </p:sp>
+      <p:sp>
+        <p:nvSpPr>
+          <p:cNvPr id="3" name="TextBox 2"/>
+          <p:cNvSpPr txBox="1"/>
+          <p:nvPr/>
+        </p:nvSpPr>
+        <p:spPr>
+          <a:xfrm>
+            <a:off x="228600" y="530352"/>
+            <a:ext cx="11731752" cy="292608"/>
+          </a:xfrm>
+          <a:prstGeom prst="rect">
+            <a:avLst/>
+          </a:prstGeom>
+          <a:noFill/>
+        </p:spPr>
+        <p:txBody>
+          <a:bodyPr wrap="square">
+            <a:spAutoFit/>
+          </a:bodyPr>
+          <a:lstStyle/>
+          <a:p>
+            <a:pPr algn="l"/>
+            <a:r>
+              <a:rPr sz="950" b="0">
+                <a:solidFill>
+                  <a:srgbClr val="2E75B6"/>
+                </a:solidFill>
+              </a:rPr>
+              <a:t>h_rms x h_kurt x temp_mean 3축  |  Normal(파랑) vs Anomaly(빨강X)</a:t>
+            </a:r>
+          </a:p>
+        </p:txBody>
+      </p:sp>
+      <p:pic>
+        <p:nvPicPr>
+          <p:cNvPr id="4" name="Picture 3" descr="V1_3d_scatter.png"/>
+          <p:cNvPicPr>
+            <a:picLocks noChangeAspect="1"/>
+          </p:cNvPicPr>
+          <p:nvPr/>
+        </p:nvPicPr>
+        <p:blipFill>
+          <a:blip r:embed="rId2"/>
+          <a:stretch>
+            <a:fillRect/>
+          </a:stretch>
+        </p:blipFill>
+        <p:spPr>
+          <a:xfrm>
+            <a:off x="182880" y="896112"/>
+            <a:ext cx="4937760" cy="5227320"/>
+          </a:xfrm>
+          <a:prstGeom prst="rect">
+            <a:avLst/>
+          </a:prstGeom>
+        </p:spPr>
+      </p:pic>
+      <p:sp>
+        <p:nvSpPr>
+          <p:cNvPr id="5" name="TextBox 4"/>
+          <p:cNvSpPr txBox="1"/>
+          <p:nvPr/>
+        </p:nvSpPr>
+        <p:spPr>
+          <a:xfrm>
+            <a:off x="5349240" y="914400"/>
+            <a:ext cx="3520440" cy="347472"/>
+          </a:xfrm>
+          <a:prstGeom prst="rect">
+            <a:avLst/>
+          </a:prstGeom>
+          <a:noFill/>
+        </p:spPr>
+        <p:txBody>
+          <a:bodyPr wrap="square">
+            <a:spAutoFit/>
+          </a:bodyPr>
+          <a:lstStyle/>
+          <a:p>
+            <a:pPr algn="l"/>
+            <a:r>
+              <a:rPr sz="1100" b="1">
+                <a:solidFill>
+                  <a:srgbClr val="2E75B6"/>
+                </a:solidFill>
+              </a:rPr>
+              <a:t>핵심 인사이트</a:t>
+            </a:r>
+          </a:p>
+        </p:txBody>
+      </p:sp>
+      <p:sp>
+        <p:nvSpPr>
+          <p:cNvPr id="6" name="TextBox 5"/>
+          <p:cNvSpPr txBox="1"/>
+          <p:nvPr/>
+        </p:nvSpPr>
+        <p:spPr>
+          <a:xfrm>
+            <a:off x="5349240" y="1298448"/>
+            <a:ext cx="3520440" cy="4114800"/>
+          </a:xfrm>
+          <a:prstGeom prst="rect">
+            <a:avLst/>
+          </a:prstGeom>
+          <a:noFill/>
+        </p:spPr>
+        <p:txBody>
+          <a:bodyPr wrap="square">
+            <a:spAutoFit/>
+          </a:bodyPr>
+          <a:lstStyle/>
+          <a:p>
+            <a:pPr algn="l"/>
+            <a:r>
+              <a:rPr sz="950" b="0">
+                <a:solidFill>
+                  <a:srgbClr val="1A1A1A"/>
+                </a:solidFill>
+              </a:rPr>
+              <a:t>1. 정상 샘플(파랑)
+   h_rms 낮음 + h_kurt 중간
+   -&gt; 밀집 클러스터 형성
+2. 이상 샘플(빨강X)
+   h_rms 급등 + h_kurt 극값
+   -&gt; 3D 공간에서 명확 분리
+3. SHAP 중요도 1위(h_rms), 2위(h_kurt)
+   3D 시각화와 완전 일치
+   -&gt; 특징 선택 타당성 입증
+4. 2D ROC 대비 추가 인사이트
+   비선형 분리 경계 확인
+   초기/중기/말기 열화 클러스터
+   시각적 구분 가능</a:t>
+            </a:r>
+          </a:p>
+        </p:txBody>
+      </p:sp>
+      <p:sp>
+        <p:nvSpPr>
+          <p:cNvPr id="7" name="TextBox 6"/>
+          <p:cNvSpPr txBox="1"/>
+          <p:nvPr/>
+        </p:nvSpPr>
+        <p:spPr>
+          <a:xfrm>
+            <a:off x="228600" y="5623560"/>
+            <a:ext cx="11731752" cy="502920"/>
+          </a:xfrm>
+          <a:prstGeom prst="rect">
+            <a:avLst/>
+          </a:prstGeom>
+          <a:noFill/>
+        </p:spPr>
+        <p:txBody>
+          <a:bodyPr wrap="square">
+            <a:spAutoFit/>
+          </a:bodyPr>
+          <a:lstStyle/>
+          <a:p>
+            <a:pPr algn="l"/>
+            <a:r>
+              <a:rPr sz="850" b="0">
+                <a:solidFill>
+                  <a:srgbClr val="C00000"/>
+                </a:solidFill>
+              </a:rPr>
+              <a:t>* 3D 시각화: 특징 간 상호작용(h_rms+h_kurt 동시 증가 = 이상 확정 신호) 직관적 확인</a:t>
+            </a:r>
+          </a:p>
+        </p:txBody>
+      </p:sp>
+    </p:spTree>
+  </p:cSld>
+  <p:clrMapOvr>
+    <a:masterClrMapping/>
+  </p:clrMapOvr>
+</p:sld>
+</file>
+
+<file path=ppt/slides/slide13.xml><?xml version="1.0" encoding="utf-8"?>
+<p:sld xmlns:a="http://schemas.openxmlformats.org/drawingml/2006/main" xmlns:p="http://schemas.openxmlformats.org/presentationml/2006/main" xmlns:r="http://schemas.openxmlformats.org/officeDocument/2006/relationships">
+  <p:cSld>
+    <p:spTree>
+      <p:nvGrpSpPr>
+        <p:cNvPr id="1" name=""/>
+        <p:cNvGrpSpPr/>
+        <p:nvPr/>
+      </p:nvGrpSpPr>
+      <p:grpSpPr/>
+      <p:sp>
+        <p:nvSpPr>
+          <p:cNvPr id="2" name="TextBox 1"/>
+          <p:cNvSpPr txBox="1"/>
+          <p:nvPr/>
+        </p:nvSpPr>
+        <p:spPr>
+          <a:xfrm>
+            <a:off x="228600" y="73152"/>
+            <a:ext cx="11731752" cy="475488"/>
+          </a:xfrm>
+          <a:prstGeom prst="rect">
+            <a:avLst/>
+          </a:prstGeom>
+          <a:noFill/>
+        </p:spPr>
+        <p:txBody>
+          <a:bodyPr wrap="square">
+            <a:spAutoFit/>
+          </a:bodyPr>
+          <a:lstStyle/>
+          <a:p>
+            <a:pPr algn="l"/>
+            <a:r>
+              <a:rPr sz="1700" b="1">
+                <a:solidFill>
+                  <a:srgbClr val="1F4E79"/>
+                </a:solidFill>
+              </a:rPr>
+              <a:t>부록 J. Autoencoder 비지도 이상탐지 — 라벨 없이 이상 감지</a:t>
+            </a:r>
+          </a:p>
+        </p:txBody>
+      </p:sp>
+      <p:sp>
+        <p:nvSpPr>
+          <p:cNvPr id="3" name="TextBox 2"/>
+          <p:cNvSpPr txBox="1"/>
+          <p:nvPr/>
+        </p:nvSpPr>
+        <p:spPr>
+          <a:xfrm>
+            <a:off x="228600" y="530352"/>
+            <a:ext cx="11731752" cy="292608"/>
+          </a:xfrm>
+          <a:prstGeom prst="rect">
+            <a:avLst/>
+          </a:prstGeom>
+          <a:noFill/>
+        </p:spPr>
+        <p:txBody>
+          <a:bodyPr wrap="square">
+            <a:spAutoFit/>
+          </a:bodyPr>
+          <a:lstStyle/>
+          <a:p>
+            <a:pPr algn="l"/>
+            <a:r>
+              <a:rPr sz="950" b="0">
+                <a:solidFill>
+                  <a:srgbClr val="2E75B6"/>
+                </a:solidFill>
+              </a:rPr>
+              <a:t>정상 데이터만 학습  |  MSE 재구성 오류 기반  |  AUC=0.968  Recall=0.828</a:t>
+            </a:r>
+          </a:p>
+        </p:txBody>
+      </p:sp>
+      <p:pic>
+        <p:nvPicPr>
+          <p:cNvPr id="4" name="Picture 3" descr="V3_ae_roc.png"/>
+          <p:cNvPicPr>
+            <a:picLocks noChangeAspect="1"/>
+          </p:cNvPicPr>
+          <p:nvPr/>
+        </p:nvPicPr>
+        <p:blipFill>
+          <a:blip r:embed="rId2"/>
+          <a:stretch>
+            <a:fillRect/>
+          </a:stretch>
+        </p:blipFill>
+        <p:spPr>
+          <a:xfrm>
+            <a:off x="182880" y="896112"/>
+            <a:ext cx="5303520" cy="1727211"/>
+          </a:xfrm>
+          <a:prstGeom prst="rect">
+            <a:avLst/>
+          </a:prstGeom>
+        </p:spPr>
+      </p:pic>
+      <p:sp>
+        <p:nvSpPr>
+          <p:cNvPr id="5" name="TextBox 4"/>
+          <p:cNvSpPr txBox="1"/>
+          <p:nvPr/>
+        </p:nvSpPr>
+        <p:spPr>
+          <a:xfrm>
+            <a:off x="5669280" y="914400"/>
+            <a:ext cx="3246120" cy="347472"/>
+          </a:xfrm>
+          <a:prstGeom prst="rect">
+            <a:avLst/>
+          </a:prstGeom>
+          <a:noFill/>
+        </p:spPr>
+        <p:txBody>
+          <a:bodyPr wrap="square">
+            <a:spAutoFit/>
+          </a:bodyPr>
+          <a:lstStyle/>
+          <a:p>
+            <a:pPr algn="l"/>
+            <a:r>
+              <a:rPr sz="1100" b="1">
+                <a:solidFill>
+                  <a:srgbClr val="2E75B6"/>
+                </a:solidFill>
+              </a:rPr>
+              <a:t>아키텍처  (Encoder-Decoder)</a:t>
+            </a:r>
+          </a:p>
+        </p:txBody>
+      </p:sp>
+      <p:sp>
+        <p:nvSpPr>
+          <p:cNvPr id="6" name="TextBox 5"/>
+          <p:cNvSpPr txBox="1"/>
+          <p:nvPr/>
+        </p:nvSpPr>
+        <p:spPr>
+          <a:xfrm>
+            <a:off x="5669280" y="1298448"/>
+            <a:ext cx="3246120" cy="2560320"/>
+          </a:xfrm>
+          <a:prstGeom prst="rect">
+            <a:avLst/>
+          </a:prstGeom>
+          <a:noFill/>
+        </p:spPr>
+        <p:txBody>
+          <a:bodyPr wrap="square">
+            <a:spAutoFit/>
+          </a:bodyPr>
+          <a:lstStyle/>
+          <a:p>
+            <a:pPr algn="l"/>
+            <a:r>
+              <a:rPr sz="950" b="0">
+                <a:solidFill>
+                  <a:srgbClr val="1A1A1A"/>
+                </a:solidFill>
+              </a:rPr>
+              <a:t>Input(11) -&gt; Dense64+Drop
+-&gt; Dense32+Drop -&gt; Dense16
+   [Bottleneck: 압축 표현]
+-&gt; Dense32+Drop -&gt; Dense64
+-&gt; Output(11, Linear)
+학습: 정상(label=0)만 / Adam lr=0.001
+Loss: MSE / EarlyStopping(patience=5)
+수렴: 56epoch</a:t>
+            </a:r>
+          </a:p>
+        </p:txBody>
+      </p:sp>
+      <p:sp>
+        <p:nvSpPr>
+          <p:cNvPr id="7" name="TextBox 6"/>
+          <p:cNvSpPr txBox="1"/>
+          <p:nvPr/>
+        </p:nvSpPr>
+        <p:spPr>
+          <a:xfrm>
+            <a:off x="5669280" y="3977639"/>
+            <a:ext cx="3246120" cy="347472"/>
+          </a:xfrm>
+          <a:prstGeom prst="rect">
+            <a:avLst/>
+          </a:prstGeom>
+          <a:noFill/>
+        </p:spPr>
+        <p:txBody>
+          <a:bodyPr wrap="square">
+            <a:spAutoFit/>
+          </a:bodyPr>
+          <a:lstStyle/>
+          <a:p>
+            <a:pPr algn="l"/>
+            <a:r>
+              <a:rPr sz="1100" b="1">
+                <a:solidFill>
+                  <a:srgbClr val="2E75B6"/>
+                </a:solidFill>
+              </a:rPr>
+              <a:t>성능 비교 (합성 FEMTO 테스트셋)</a:t>
+            </a:r>
+          </a:p>
+        </p:txBody>
+      </p:sp>
+      <p:sp>
+        <p:nvSpPr>
+          <p:cNvPr id="8" name="TextBox 7"/>
+          <p:cNvSpPr txBox="1"/>
+          <p:nvPr/>
+        </p:nvSpPr>
+        <p:spPr>
+          <a:xfrm>
+            <a:off x="5669280" y="4370832"/>
+            <a:ext cx="3246120" cy="1828800"/>
+          </a:xfrm>
+          <a:prstGeom prst="rect">
+            <a:avLst/>
+          </a:prstGeom>
+          <a:noFill/>
+        </p:spPr>
+        <p:txBody>
+          <a:bodyPr wrap="square">
+            <a:spAutoFit/>
+          </a:bodyPr>
+          <a:lstStyle/>
+          <a:p>
+            <a:pPr algn="l"/>
+            <a:r>
+              <a:rPr sz="950" b="0">
+                <a:solidFill>
+                  <a:srgbClr val="1A1A1A"/>
+                </a:solidFill>
+              </a:rPr>
+              <a:t>모델          Recall   AUC
+RF (지도)     0.91    0.99
+AE (비지도)   0.828   0.968
+AUC 0.968: 비지도로 RF에 근접
+Recall 0.828: 고장의 83% 탐지
+라벨 없는 신규 설비에 최적</a:t>
+            </a:r>
+          </a:p>
+        </p:txBody>
+      </p:sp>
+      <p:sp>
+        <p:nvSpPr>
+          <p:cNvPr id="9" name="TextBox 8"/>
+          <p:cNvSpPr txBox="1"/>
+          <p:nvPr/>
+        </p:nvSpPr>
+        <p:spPr>
+          <a:xfrm>
+            <a:off x="228600" y="5623560"/>
+            <a:ext cx="11731752" cy="502920"/>
+          </a:xfrm>
+          <a:prstGeom prst="rect">
+            <a:avLst/>
+          </a:prstGeom>
+          <a:noFill/>
+        </p:spPr>
+        <p:txBody>
+          <a:bodyPr wrap="square">
+            <a:spAutoFit/>
+          </a:bodyPr>
+          <a:lstStyle/>
+          <a:p>
+            <a:pPr algn="l"/>
+            <a:r>
+              <a:rPr sz="850" b="1">
+                <a:solidFill>
+                  <a:srgbClr val="378632"/>
+                </a:solidFill>
+              </a:rPr>
+              <a:t>활용 권고: AE(비지도, 1차 조기감지) -&gt; RF(지도, 2차 정밀분류) 2단계 PdM 파이프라인 권장</a:t>
+            </a:r>
+          </a:p>
+        </p:txBody>
+      </p:sp>
+    </p:spTree>
+  </p:cSld>
+  <p:clrMapOvr>
+    <a:masterClrMapping/>
+  </p:clrMapOvr>
+</p:sld>
+</file>
+
+<file path=ppt/slides/slide14.xml><?xml version="1.0" encoding="utf-8"?>
+<p:sld xmlns:a="http://schemas.openxmlformats.org/drawingml/2006/main" xmlns:p="http://schemas.openxmlformats.org/presentationml/2006/main" xmlns:r="http://schemas.openxmlformats.org/officeDocument/2006/relationships">
+  <p:cSld>
+    <p:spTree>
+      <p:nvGrpSpPr>
+        <p:cNvPr id="1" name=""/>
+        <p:cNvGrpSpPr/>
+        <p:nvPr/>
+      </p:nvGrpSpPr>
+      <p:grpSpPr/>
+      <p:sp>
+        <p:nvSpPr>
+          <p:cNvPr id="2" name="TextBox 1"/>
+          <p:cNvSpPr txBox="1"/>
+          <p:nvPr/>
+        </p:nvSpPr>
+        <p:spPr>
+          <a:xfrm>
+            <a:off x="228600" y="73152"/>
+            <a:ext cx="11731752" cy="475488"/>
+          </a:xfrm>
+          <a:prstGeom prst="rect">
+            <a:avLst/>
+          </a:prstGeom>
+          <a:noFill/>
+        </p:spPr>
+        <p:txBody>
+          <a:bodyPr wrap="square">
+            <a:spAutoFit/>
+          </a:bodyPr>
+          <a:lstStyle/>
+          <a:p>
+            <a:pPr algn="l"/>
+            <a:r>
+              <a:rPr sz="1700" b="1">
+                <a:solidFill>
+                  <a:srgbClr val="1F4E79"/>
+                </a:solidFill>
+              </a:rPr>
+              <a:t>부록 K. ROC 커브 &amp; 임계값 결정 원리 (CNN+LSTM 이진 분류)</a:t>
+            </a:r>
+          </a:p>
+        </p:txBody>
+      </p:sp>
+      <p:sp>
+        <p:nvSpPr>
+          <p:cNvPr id="3" name="TextBox 2"/>
+          <p:cNvSpPr txBox="1"/>
+          <p:nvPr/>
+        </p:nvSpPr>
+        <p:spPr>
+          <a:xfrm>
+            <a:off x="228600" y="530352"/>
+            <a:ext cx="11731752" cy="292608"/>
+          </a:xfrm>
+          <a:prstGeom prst="rect">
+            <a:avLst/>
+          </a:prstGeom>
+          <a:noFill/>
+        </p:spPr>
+        <p:txBody>
+          <a:bodyPr wrap="square">
+            <a:spAutoFit/>
+          </a:bodyPr>
+          <a:lstStyle/>
+          <a:p>
+            <a:pPr algn="l"/>
+            <a:r>
+              <a:rPr sz="950" b="0">
+                <a:solidFill>
+                  <a:srgbClr val="2E75B6"/>
+                </a:solidFill>
+              </a:rPr>
+              <a:t>AUC=0.88 (변별력 지표)  |  운영 임계값 0.50 (Youden's J)  |  Streamlit 슬라이더 실시간 조정</a:t>
+            </a:r>
+          </a:p>
+        </p:txBody>
+      </p:sp>
+      <p:sp>
+        <p:nvSpPr>
+          <p:cNvPr id="4" name="TextBox 3"/>
+          <p:cNvSpPr txBox="1"/>
+          <p:nvPr/>
+        </p:nvSpPr>
+        <p:spPr>
+          <a:xfrm>
+            <a:off x="228600" y="914400"/>
+            <a:ext cx="4206240" cy="365760"/>
+          </a:xfrm>
+          <a:prstGeom prst="rect">
+            <a:avLst/>
+          </a:prstGeom>
+          <a:noFill/>
+        </p:spPr>
+        <p:txBody>
+          <a:bodyPr wrap="square">
+            <a:spAutoFit/>
+          </a:bodyPr>
+          <a:lstStyle/>
+          <a:p>
+            <a:pPr algn="l"/>
+            <a:r>
+              <a:rPr sz="1200" b="1">
+                <a:solidFill>
+                  <a:srgbClr val="2E75B6"/>
+                </a:solidFill>
+              </a:rPr>
+              <a:t>핵심 개념: AUC vs Threshold</a:t>
+            </a:r>
+          </a:p>
+        </p:txBody>
+      </p:sp>
+      <p:sp>
+        <p:nvSpPr>
+          <p:cNvPr id="5" name="TextBox 4"/>
+          <p:cNvSpPr txBox="1"/>
+          <p:nvPr/>
+        </p:nvSpPr>
+        <p:spPr>
+          <a:xfrm>
+            <a:off x="228600" y="1325880"/>
+            <a:ext cx="4206240" cy="3840480"/>
+          </a:xfrm>
+          <a:prstGeom prst="rect">
+            <a:avLst/>
+          </a:prstGeom>
+          <a:noFill/>
+        </p:spPr>
+        <p:txBody>
+          <a:bodyPr wrap="square">
+            <a:spAutoFit/>
+          </a:bodyPr>
+          <a:lstStyle/>
+          <a:p>
+            <a:pPr algn="l"/>
+            <a:r>
+              <a:rPr sz="1000" b="0">
+                <a:solidFill>
+                  <a:srgbClr val="1A1A1A"/>
+                </a:solidFill>
+              </a:rPr>
+              <a:t>AUC (ROC 면적) = 0.88
+  Threshold 무관한 모델 변별력 척도
+  Threshold 변경해도 AUC 값 불변
+  모델 선택·비교 기준으로 사용
+운영 임계값 = 0.50
+  Youden's J Index = max(TPR - FPR)
+  최적점: FPR~0.05, TPR~0.85
+임계값 결정 3가지 방법:
+  A. Youden's J -&gt; 균형 최적 (본 프로젝트 적용)
+  B. F1 Score 최대화 -&gt; Precision/Recall 균형
+  C. 백분위 95% -&gt; 간편, 분포 의존적</a:t>
+            </a:r>
+          </a:p>
+        </p:txBody>
+      </p:sp>
+      <p:sp>
+        <p:nvSpPr>
+          <p:cNvPr id="6" name="TextBox 5"/>
+          <p:cNvSpPr txBox="1"/>
+          <p:nvPr/>
+        </p:nvSpPr>
+        <p:spPr>
+          <a:xfrm>
+            <a:off x="4663440" y="914400"/>
+            <a:ext cx="4206240" cy="365760"/>
+          </a:xfrm>
+          <a:prstGeom prst="rect">
+            <a:avLst/>
+          </a:prstGeom>
+          <a:noFill/>
+        </p:spPr>
+        <p:txBody>
+          <a:bodyPr wrap="square">
+            <a:spAutoFit/>
+          </a:bodyPr>
+          <a:lstStyle/>
+          <a:p>
+            <a:pPr algn="l"/>
+            <a:r>
+              <a:rPr sz="1200" b="1">
+                <a:solidFill>
+                  <a:srgbClr val="2E75B6"/>
+                </a:solidFill>
+              </a:rPr>
+              <a:t>Threshold별 PdM 운영 시나리오</a:t>
+            </a:r>
+          </a:p>
+        </p:txBody>
+      </p:sp>
+      <p:sp>
+        <p:nvSpPr>
+          <p:cNvPr id="7" name="TextBox 6"/>
+          <p:cNvSpPr txBox="1"/>
+          <p:nvPr/>
+        </p:nvSpPr>
+        <p:spPr>
+          <a:xfrm>
+            <a:off x="4663440" y="1325880"/>
+            <a:ext cx="4206240" cy="3840480"/>
+          </a:xfrm>
+          <a:prstGeom prst="rect">
+            <a:avLst/>
+          </a:prstGeom>
+          <a:noFill/>
+        </p:spPr>
+        <p:txBody>
+          <a:bodyPr wrap="square">
+            <a:spAutoFit/>
+          </a:bodyPr>
+          <a:lstStyle/>
+          <a:p>
+            <a:pPr algn="l"/>
+            <a:r>
+              <a:rPr sz="1000" b="0">
+                <a:solidFill>
+                  <a:srgbClr val="1A1A1A"/>
+                </a:solidFill>
+              </a:rPr>
+              <a:t>낮은 임계값 (0.3 ~ 0.45)
+  Recall 상승 / FP(오경보) 증가
+  PdM 현장 권장 -- 미탐지 최소화
+기본 임계값 (0.50)
+  Youden's J 균형점
+  일반 운영 환경 적합
+높은 임계값 (0.65 ~ 0.80)
+  Precision 상승 / FN(미탐지) 증가
+  오경보 최소화 환경
+Streamlit 사이드바 슬라이더로
+현장 운영 정책에 맞게 실시간 조정
+변경 이력 자동 기록 (감사 추적)</a:t>
+            </a:r>
+          </a:p>
+        </p:txBody>
+      </p:sp>
+      <p:sp>
+        <p:nvSpPr>
+          <p:cNvPr id="8" name="TextBox 7"/>
+          <p:cNvSpPr txBox="1"/>
+          <p:nvPr/>
+        </p:nvSpPr>
+        <p:spPr>
+          <a:xfrm>
+            <a:off x="228600" y="5623560"/>
+            <a:ext cx="11731752" cy="502920"/>
+          </a:xfrm>
+          <a:prstGeom prst="rect">
+            <a:avLst/>
+          </a:prstGeom>
+          <a:noFill/>
+        </p:spPr>
+        <p:txBody>
+          <a:bodyPr wrap="square">
+            <a:spAutoFit/>
+          </a:bodyPr>
+          <a:lstStyle/>
+          <a:p>
+            <a:pPr algn="l"/>
+            <a:r>
+              <a:rPr sz="850" b="0">
+                <a:solidFill>
+                  <a:srgbClr val="C00000"/>
+                </a:solidFill>
+              </a:rPr>
+              <a:t>AUC 0.88 = 모델 변별력(threshold 무관)  |  운영 0.50 = Youden's J  |  현장: Recall 우선시 0.3~0.45로 낮춤</a:t>
             </a:r>
           </a:p>
         </p:txBody>
